--- a/Claude outputs/control_law_reference_deck.pptx
+++ b/Claude outputs/control_law_reference_deck.pptx
@@ -11316,8 +11316,8 @@
         </p:blipFill>
         <p:spPr>
           <a:xfrm>
-            <a:off x="548640" y="1928638"/>
-            <a:ext cx="11064240" cy="2004028"/>
+            <a:off x="548640" y="2119134"/>
+            <a:ext cx="11064240" cy="1623037"/>
           </a:xfrm>
           <a:prstGeom prst="rect">
             <a:avLst/>
@@ -11442,7 +11442,7 @@
                 <a:ea typeface="Courier New" pitchFamily="34" charset="-122"/>
                 <a:cs typeface="Courier New" pitchFamily="34" charset="-120"/>
               </a:rPr>
-              <a:t>s  = min(1, 10^(cap/10)·tr(G_xx)/tr(HXHᴴ))</a:t>
+              <a:t>s  = min(1, 10^(startup_cap_db/10)·tr(G_xx)/tr(X))</a:t>
             </a:r>
             <a:endParaRPr lang="en-US" sz="1000" dirty="0"/>
           </a:p>
@@ -12915,7 +12915,7 @@
                 <a:ea typeface="Calibri" pitchFamily="34" charset="-122"/>
                 <a:cs typeface="Calibri" pitchFamily="34" charset="-120"/>
               </a:rPr>
-              <a:t>A pure integrator, gain 1
+              <a:t>Startup cap ≠ coherence cap
 </a:t>
             </a:r>
             <a:endParaRPr lang="en-US" sz="1250" dirty="0"/>
@@ -12933,7 +12933,7 @@
                 <a:ea typeface="Calibri" pitchFamily="34" charset="-122"/>
                 <a:cs typeface="Calibri" pitchFamily="34" charset="-120"/>
               </a:rPr>
-              <a:t>log X(k) = log X(k−1) + e(k−1), fed a lagged error. Simulation: ~53 cycles to settle, ~103 % peak overshoot.</a:t>
+              <a:t>startup_test_level_cap_db is a level clamp on cycle one; max_drive_coherence is the coherence cap. Unrelated parameters.</a:t>
             </a:r>
             <a:endParaRPr lang="en-US" sz="1250" dirty="0"/>
           </a:p>
